--- a/docs/transferai-prospection/packs-entreprises-cibles-2026-07/ATTIJARI_CI/Deck_Attijari_CI_2026-07-07.pptx
+++ b/docs/transferai-prospection/packs-entreprises-cibles-2026-07/ATTIJARI_CI/Deck_Attijari_CI_2026-07-07.pptx
@@ -3153,8 +3153,8 @@
         </p:nvSpPr>
         <p:spPr>
           <a:xfrm>
-            <a:off x="548640" y="6355080"/>
-            <a:ext cx="7315200" cy="320040"/>
+            <a:off x="548640" y="6035040"/>
+            <a:ext cx="7315200" cy="274320"/>
           </a:xfrm>
           <a:prstGeom prst="rect">
             <a:avLst/>
